--- a/dist/초6/영어/듣기와읽기/초6_영어_듣기와읽기_01_핵심정보파악_학생용.pptx
+++ b/dist/초6/영어/듣기와읽기/초6_영어_듣기와읽기_01_핵심정보파악_학생용.pptx
@@ -119,19 +119,19 @@
   <p:extLst>
     <p:ext uri="{521415D9-36F7-43E2-AB2F-B90AF26B5E84}">
       <p14:sectionLst xmlns:p14="http://schemas.microsoft.com/office/powerpoint/2010/main">
-        <p14:section name="도입" id="{e8002b11-278f-48d5-0207-bbab9fd47ae7}">
+        <p14:section name="도입" id="{2e83c816-702e-1917-7fb6-4b25a49c7173}">
           <p14:sldIdLst>
             <p14:sldId id="256"/>
             <p14:sldId id="257"/>
           </p14:sldIdLst>
         </p14:section>
-        <p14:section name="개념" id="{38586180-a134-f277-4d75-c5c21a69356e}">
+        <p14:section name="개념" id="{759bd155-e85e-399a-b501-1e9fad6277f9}">
           <p14:sldIdLst>
             <p14:sldId id="258"/>
             <p14:sldId id="259"/>
           </p14:sldIdLst>
         </p14:section>
-        <p14:section name="연습" id="{0aa84206-aab0-9f2b-4692-4c24fdfddcfb}">
+        <p14:section name="연습" id="{2570ae83-87a0-cbdb-6272-deedbc1187bf}">
           <p14:sldIdLst>
             <p14:sldId id="260"/>
             <p14:sldId id="261"/>
@@ -140,18 +140,18 @@
             <p14:sldId id="264"/>
           </p14:sldIdLst>
         </p14:section>
-        <p14:section name="확인" id="{372b5417-6fa5-e626-b9f9-ec3dbc23fe25}">
+        <p14:section name="확인" id="{05e6b362-ea26-2b57-15d7-3b7ebe945731}">
           <p14:sldIdLst>
             <p14:sldId id="265"/>
             <p14:sldId id="266"/>
           </p14:sldIdLst>
         </p14:section>
-        <p14:section name="정리" id="{b6f8249b-d430-7cbe-fb11-a222824b6bbd}">
+        <p14:section name="정리" id="{efc0751f-7c1e-9c1c-5d06-bd42434f20a4}">
           <p14:sldIdLst>
             <p14:sldId id="267"/>
           </p14:sldIdLst>
         </p14:section>
-        <p14:section name="보충" id="{0744aa00-677c-5a62-212e-7ebdd023f1f5}">
+        <p14:section name="보충" id="{39adc8d2-c995-9f07-c12b-bbe5b9813a1b}">
           <p14:sldIdLst>
             <p14:sldId id="268"/>
           </p14:sldIdLst>
